--- a/weekly_presentations/week03_avellaneda_stoikov.pptx
+++ b/weekly_presentations/week03_avellaneda_stoikov.pptx
@@ -11,6 +11,9 @@
     <p:sldId id="259" r:id="rId10"/>
     <p:sldId id="260" r:id="rId11"/>
     <p:sldId id="261" r:id="rId12"/>
+    <p:sldId id="262" r:id="rId13"/>
+    <p:sldId id="263" r:id="rId14"/>
+    <p:sldId id="264" r:id="rId15"/>
   </p:sldIdLst>
   <p:sldSz cx="12191695" cy="6858000" type="screen4x3"/>
   <p:notesSz cx="6858000" cy="9144000"/>
@@ -3183,7 +3186,7 @@
           <a:lstStyle/>
           <a:p>
             <a:r>
-              <a:rPr sz="3200" b="1" i="0">
+              <a:rPr sz="3000" b="1" i="0">
                 <a:solidFill>
                   <a:srgbClr val="990000"/>
                 </a:solidFill>
@@ -3194,13 +3197,13 @@
           </a:p>
           <a:p>
             <a:r>
-              <a:rPr sz="1900" b="0" i="1">
+              <a:rPr sz="1800" b="0" i="1">
                 <a:solidFill>
                   <a:srgbClr val="6D6D6D"/>
                 </a:solidFill>
                 <a:latin typeface="Arial"/>
               </a:rPr>
-              <a:t>A worked example of optimal market making via stochastic control</a:t>
+              <a:t>Optimal market making via stochastic control -- derived from scratch</a:t>
             </a:r>
           </a:p>
         </p:txBody>
@@ -3236,49 +3239,6 @@
               </a:rPr>
               <a:t>Optimal Market Making for Cryptocurrency Options  ·  NC State University</a:t>
             </a:r>
-          </a:p>
-        </p:txBody>
-      </p:sp>
-      <p:sp>
-        <p:nvSpPr>
-          <p:cNvPr id="6" name="Rectangle 5"/>
-          <p:cNvSpPr/>
-          <p:nvPr/>
-        </p:nvSpPr>
-        <p:spPr>
-          <a:xfrm>
-            <a:off x="548640" y="5394960"/>
-            <a:ext cx="3657600" cy="38100"/>
-          </a:xfrm>
-          <a:prstGeom prst="rect">
-            <a:avLst/>
-          </a:prstGeom>
-          <a:solidFill>
-            <a:srgbClr val="CC0000"/>
-          </a:solidFill>
-          <a:ln>
-            <a:noFill/>
-          </a:ln>
-        </p:spPr>
-        <p:style>
-          <a:lnRef idx="1">
-            <a:schemeClr val="accent1"/>
-          </a:lnRef>
-          <a:fillRef idx="3">
-            <a:schemeClr val="accent1"/>
-          </a:fillRef>
-          <a:effectRef idx="2">
-            <a:schemeClr val="accent1"/>
-          </a:effectRef>
-          <a:fontRef idx="minor">
-            <a:schemeClr val="lt1"/>
-          </a:fontRef>
-        </p:style>
-        <p:txBody>
-          <a:bodyPr rtlCol="0" anchor="ctr"/>
-          <a:lstStyle/>
-          <a:p>
-            <a:pPr algn="ctr"/>
           </a:p>
         </p:txBody>
       </p:sp>
@@ -3341,13 +3301,13 @@
           <a:noFill/>
         </p:spPr>
         <p:txBody>
-          <a:bodyPr wrap="none">
+          <a:bodyPr wrap="square">
             <a:spAutoFit/>
           </a:bodyPr>
           <a:lstStyle/>
           <a:p>
             <a:r>
-              <a:rPr sz="2600" b="1" i="0">
+              <a:rPr sz="2400" b="1" i="0">
                 <a:solidFill>
                   <a:srgbClr val="990000"/>
                 </a:solidFill>
@@ -3366,8 +3326,8 @@
         </p:nvSpPr>
         <p:spPr>
           <a:xfrm>
-            <a:off x="457200" y="1234440"/>
-            <a:ext cx="11247120" cy="31750"/>
+            <a:off x="457200" y="1371600"/>
+            <a:ext cx="11247120" cy="27940"/>
           </a:xfrm>
           <a:prstGeom prst="rect">
             <a:avLst/>
@@ -3409,7 +3369,7 @@
         </p:nvSpPr>
         <p:spPr>
           <a:xfrm>
-            <a:off x="640080" y="1554480"/>
+            <a:off x="640080" y="1600200"/>
             <a:ext cx="10972800" cy="4937760"/>
           </a:xfrm>
           <a:prstGeom prst="rect">
@@ -3425,49 +3385,49 @@
           <a:p>
             <a:pPr>
               <a:spcAft>
-                <a:spcPts val="1000"/>
+                <a:spcPts val="800"/>
               </a:spcAft>
             </a:pPr>
             <a:r>
-              <a:rPr sz="1900" b="0" i="0">
+              <a:rPr sz="1700" b="0" i="0">
                 <a:solidFill>
                   <a:srgbClr val="1A1A1A"/>
                 </a:solidFill>
                 <a:latin typeface="Arial"/>
               </a:rPr>
-              <a:t>•  Set up the Avellaneda-Stoikov control problem with CARA utility</a:t>
+              <a:t>•  Set up the Avellaneda-Stoikov control problem</a:t>
             </a:r>
           </a:p>
           <a:p>
             <a:pPr>
               <a:spcAft>
-                <a:spcPts val="1000"/>
+                <a:spcPts val="800"/>
               </a:spcAft>
             </a:pPr>
             <a:r>
-              <a:rPr sz="1900" b="0" i="0">
+              <a:rPr sz="1700" b="0" i="0">
                 <a:solidFill>
                   <a:srgbClr val="1A1A1A"/>
                 </a:solidFill>
                 <a:latin typeface="Arial"/>
               </a:rPr>
-              <a:t>•  Understand the HJB equation and its reduction via the ansatz</a:t>
+              <a:t>•  Follow the HJB derivation and understand every modeling choice</a:t>
             </a:r>
           </a:p>
           <a:p>
             <a:pPr>
               <a:spcAft>
-                <a:spcPts val="1000"/>
+                <a:spcPts val="800"/>
               </a:spcAft>
             </a:pPr>
             <a:r>
-              <a:rPr sz="1900" b="0" i="0">
+              <a:rPr sz="1700" b="0" i="0">
                 <a:solidFill>
                   <a:srgbClr val="1A1A1A"/>
                 </a:solidFill>
                 <a:latin typeface="Arial"/>
               </a:rPr>
-              <a:t>•  Interpret the reservation price and optimal half-spread</a:t>
+              <a:t>•  Interpret the reservation price and the optimal half-spread</a:t>
             </a:r>
           </a:p>
         </p:txBody>
@@ -3531,19 +3491,19 @@
           <a:noFill/>
         </p:spPr>
         <p:txBody>
-          <a:bodyPr wrap="none">
+          <a:bodyPr wrap="square">
             <a:spAutoFit/>
           </a:bodyPr>
           <a:lstStyle/>
           <a:p>
             <a:r>
-              <a:rPr sz="2600" b="1" i="0">
+              <a:rPr sz="2400" b="1" i="0">
                 <a:solidFill>
                   <a:srgbClr val="990000"/>
                 </a:solidFill>
                 <a:latin typeface="Arial"/>
               </a:rPr>
-              <a:t>Lecture 1: Setup and Dynamics</a:t>
+              <a:t>Lecture 1: Setup &amp; Dynamics</a:t>
             </a:r>
           </a:p>
         </p:txBody>
@@ -3556,8 +3516,8 @@
         </p:nvSpPr>
         <p:spPr>
           <a:xfrm>
-            <a:off x="457200" y="1234440"/>
-            <a:ext cx="11247120" cy="31750"/>
+            <a:off x="457200" y="1371600"/>
+            <a:ext cx="11247120" cy="27940"/>
           </a:xfrm>
           <a:prstGeom prst="rect">
             <a:avLst/>
@@ -3599,7 +3559,7 @@
         </p:nvSpPr>
         <p:spPr>
           <a:xfrm>
-            <a:off x="640080" y="1554480"/>
+            <a:off x="640080" y="1600200"/>
             <a:ext cx="10972800" cy="4937760"/>
           </a:xfrm>
           <a:prstGeom prst="rect">
@@ -3615,65 +3575,65 @@
           <a:p>
             <a:pPr>
               <a:spcAft>
-                <a:spcPts val="1000"/>
+                <a:spcPts val="800"/>
               </a:spcAft>
             </a:pPr>
             <a:r>
-              <a:rPr sz="1900" b="0" i="0">
+              <a:rPr sz="1700" b="0" i="0">
                 <a:solidFill>
                   <a:srgbClr val="1A1A1A"/>
                 </a:solidFill>
                 <a:latin typeface="Arial"/>
               </a:rPr>
-              <a:t>•  Mid-price as arithmetic Brownian motion (chosen for tractability)</a:t>
+              <a:t>•  Mid-price: dS_t = sigma dW_t  (arithmetic Brownian motion)</a:t>
             </a:r>
           </a:p>
           <a:p>
             <a:pPr>
               <a:spcAft>
-                <a:spcPts val="1000"/>
+                <a:spcPts val="800"/>
               </a:spcAft>
             </a:pPr>
             <a:r>
-              <a:rPr sz="1900" b="0" i="0">
+              <a:rPr sz="1700" b="0" i="0">
                 <a:solidFill>
                   <a:srgbClr val="1A1A1A"/>
                 </a:solidFill>
                 <a:latin typeface="Arial"/>
               </a:rPr>
-              <a:t>•  Poisson order flow with intensity lambda(d) = A exp(-kappa d)</a:t>
+              <a:t>•  Fill intensity: lambda(delta) = A exp(-kappa delta)</a:t>
             </a:r>
           </a:p>
           <a:p>
             <a:pPr>
               <a:spcAft>
-                <a:spcPts val="1000"/>
+                <a:spcPts val="800"/>
               </a:spcAft>
             </a:pPr>
             <a:r>
-              <a:rPr sz="1900" b="0" i="0">
+              <a:rPr sz="1700" b="0" i="0">
                 <a:solidFill>
                   <a:srgbClr val="1A1A1A"/>
                 </a:solidFill>
                 <a:latin typeface="Arial"/>
               </a:rPr>
-              <a:t>•  Wealth and inventory dynamics under continuous quoting</a:t>
+              <a:t>•  Wealth from fills; inventory q jumps by +/-1 on a fill</a:t>
             </a:r>
           </a:p>
           <a:p>
             <a:pPr>
               <a:spcAft>
-                <a:spcPts val="1000"/>
+                <a:spcPts val="800"/>
               </a:spcAft>
             </a:pPr>
             <a:r>
-              <a:rPr sz="1900" b="0" i="0">
+              <a:rPr sz="1700" b="0" i="0">
                 <a:solidFill>
                   <a:srgbClr val="1A1A1A"/>
                 </a:solidFill>
                 <a:latin typeface="Arial"/>
               </a:rPr>
-              <a:t>•  Exponential (CARA) utility decouples value from wealth</a:t>
+              <a:t>•  Exponential (CARA) utility of terminal wealth</a:t>
             </a:r>
           </a:p>
         </p:txBody>
@@ -3737,19 +3697,19 @@
           <a:noFill/>
         </p:spPr>
         <p:txBody>
-          <a:bodyPr wrap="none">
+          <a:bodyPr wrap="square">
             <a:spAutoFit/>
           </a:bodyPr>
           <a:lstStyle/>
           <a:p>
             <a:r>
-              <a:rPr sz="2600" b="1" i="0">
+              <a:rPr sz="2400" b="1" i="0">
                 <a:solidFill>
                   <a:srgbClr val="990000"/>
                 </a:solidFill>
                 <a:latin typeface="Arial"/>
               </a:rPr>
-              <a:t>Lecture 2: HJB and Closed-Form Quotes</a:t>
+              <a:t>Lecture 2: HJB, Ansatz, Closed Form</a:t>
             </a:r>
           </a:p>
         </p:txBody>
@@ -3762,8 +3722,8 @@
         </p:nvSpPr>
         <p:spPr>
           <a:xfrm>
-            <a:off x="457200" y="1234440"/>
-            <a:ext cx="11247120" cy="31750"/>
+            <a:off x="457200" y="1371600"/>
+            <a:ext cx="11247120" cy="27940"/>
           </a:xfrm>
           <a:prstGeom prst="rect">
             <a:avLst/>
@@ -3805,7 +3765,7 @@
         </p:nvSpPr>
         <p:spPr>
           <a:xfrm>
-            <a:off x="640080" y="1554480"/>
+            <a:off x="640080" y="1600200"/>
             <a:ext cx="10972800" cy="4937760"/>
           </a:xfrm>
           <a:prstGeom prst="rect">
@@ -3821,65 +3781,65 @@
           <a:p>
             <a:pPr>
               <a:spcAft>
-                <a:spcPts val="1000"/>
+                <a:spcPts val="800"/>
               </a:spcAft>
             </a:pPr>
             <a:r>
-              <a:rPr sz="1900" b="0" i="0">
+              <a:rPr sz="1700" b="0" i="0">
                 <a:solidFill>
                   <a:srgbClr val="1A1A1A"/>
                 </a:solidFill>
                 <a:latin typeface="Arial"/>
               </a:rPr>
-              <a:t>•  Dynamic programming principle -&gt; HJB equation</a:t>
+              <a:t>•  Dynamic programming -&gt; HJB partial differential equation</a:t>
             </a:r>
           </a:p>
           <a:p>
             <a:pPr>
               <a:spcAft>
-                <a:spcPts val="1000"/>
+                <a:spcPts val="800"/>
               </a:spcAft>
             </a:pPr>
             <a:r>
-              <a:rPr sz="1900" b="0" i="0">
+              <a:rPr sz="1700" b="0" i="0">
                 <a:solidFill>
                   <a:srgbClr val="1A1A1A"/>
                 </a:solidFill>
                 <a:latin typeface="Arial"/>
               </a:rPr>
-              <a:t>•  Separation ansatz V = -exp(-gamma(x+qS)) theta(t,q)</a:t>
+              <a:t>•  Separation ansatz collapses HJB to ODEs in inventory</a:t>
             </a:r>
           </a:p>
           <a:p>
             <a:pPr>
               <a:spcAft>
-                <a:spcPts val="1000"/>
+                <a:spcPts val="800"/>
               </a:spcAft>
             </a:pPr>
             <a:r>
-              <a:rPr sz="1900" b="0" i="0">
+              <a:rPr sz="1700" b="0" i="0">
                 <a:solidFill>
                   <a:srgbClr val="1A1A1A"/>
                 </a:solidFill>
                 <a:latin typeface="Arial"/>
               </a:rPr>
-              <a:t>•  Reservation price r = S - q gamma sigma^2 (T-t)</a:t>
+              <a:t>•  Asymptotic (long-horizon) closed-form quotes</a:t>
             </a:r>
           </a:p>
           <a:p>
             <a:pPr>
               <a:spcAft>
-                <a:spcPts val="1000"/>
+                <a:spcPts val="800"/>
               </a:spcAft>
             </a:pPr>
             <a:r>
-              <a:rPr sz="1900" b="0" i="0">
+              <a:rPr sz="1700" b="0" i="0">
                 <a:solidFill>
                   <a:srgbClr val="1A1A1A"/>
                 </a:solidFill>
                 <a:latin typeface="Arial"/>
               </a:rPr>
-              <a:t>•  Half-spread = (1/gamma) ln(1+gamma/kappa) + (gamma sigma^2 / 2)(T-t)</a:t>
+              <a:t>•  Reservation price skews quotes against inventory</a:t>
             </a:r>
           </a:p>
         </p:txBody>
@@ -3918,7 +3878,7 @@
         </p:blipFill>
         <p:spPr>
           <a:xfrm>
-            <a:off x="9784080" y="274320"/>
+            <a:off x="9784080" y="228600"/>
             <a:ext cx="2011680" cy="316653"/>
           </a:xfrm>
           <a:prstGeom prst="rect">
@@ -3934,8 +3894,8 @@
         </p:nvSpPr>
         <p:spPr>
           <a:xfrm>
-            <a:off x="457200" y="457200"/>
-            <a:ext cx="8961120" cy="822960"/>
+            <a:off x="457200" y="411480"/>
+            <a:ext cx="8961120" cy="731520"/>
           </a:xfrm>
           <a:prstGeom prst="rect">
             <a:avLst/>
@@ -3949,131 +3909,41 @@
           <a:lstStyle/>
           <a:p>
             <a:r>
-              <a:rPr sz="2600" b="1" i="0">
+              <a:rPr sz="2200" b="1" i="0">
                 <a:solidFill>
                   <a:srgbClr val="990000"/>
                 </a:solidFill>
                 <a:latin typeface="Arial"/>
               </a:rPr>
-              <a:t>Recitation</a:t>
-            </a:r>
-          </a:p>
-        </p:txBody>
-      </p:sp>
-      <p:sp>
-        <p:nvSpPr>
-          <p:cNvPr id="4" name="Rectangle 3"/>
-          <p:cNvSpPr/>
+              <a:t>Illustration</a:t>
+            </a:r>
+          </a:p>
+        </p:txBody>
+      </p:sp>
+      <p:pic>
+        <p:nvPicPr>
+          <p:cNvPr id="4" name="Picture 3" descr="week03.png"/>
+          <p:cNvPicPr>
+            <a:picLocks noChangeAspect="1"/>
+          </p:cNvPicPr>
           <p:nvPr/>
-        </p:nvSpPr>
-        <p:spPr>
-          <a:xfrm>
-            <a:off x="457200" y="1234440"/>
-            <a:ext cx="11247120" cy="31750"/>
+        </p:nvPicPr>
+        <p:blipFill>
+          <a:blip r:embed="rId3"/>
+          <a:stretch>
+            <a:fillRect/>
+          </a:stretch>
+        </p:blipFill>
+        <p:spPr>
+          <a:xfrm>
+            <a:off x="1280160" y="1371600"/>
+            <a:ext cx="9601200" cy="5225143"/>
           </a:xfrm>
           <a:prstGeom prst="rect">
             <a:avLst/>
           </a:prstGeom>
-          <a:solidFill>
-            <a:srgbClr val="CC0000"/>
-          </a:solidFill>
-          <a:ln>
-            <a:noFill/>
-          </a:ln>
-        </p:spPr>
-        <p:style>
-          <a:lnRef idx="1">
-            <a:schemeClr val="accent1"/>
-          </a:lnRef>
-          <a:fillRef idx="3">
-            <a:schemeClr val="accent1"/>
-          </a:fillRef>
-          <a:effectRef idx="2">
-            <a:schemeClr val="accent1"/>
-          </a:effectRef>
-          <a:fontRef idx="minor">
-            <a:schemeClr val="lt1"/>
-          </a:fontRef>
-        </p:style>
-        <p:txBody>
-          <a:bodyPr rtlCol="0" anchor="ctr"/>
-          <a:lstStyle/>
-          <a:p>
-            <a:pPr algn="ctr"/>
-          </a:p>
-        </p:txBody>
-      </p:sp>
-      <p:sp>
-        <p:nvSpPr>
-          <p:cNvPr id="5" name="TextBox 4"/>
-          <p:cNvSpPr txBox="1"/>
-          <p:nvPr/>
-        </p:nvSpPr>
-        <p:spPr>
-          <a:xfrm>
-            <a:off x="640080" y="1554480"/>
-            <a:ext cx="10972800" cy="4937760"/>
-          </a:xfrm>
-          <a:prstGeom prst="rect">
-            <a:avLst/>
-          </a:prstGeom>
-          <a:noFill/>
-        </p:spPr>
-        <p:txBody>
-          <a:bodyPr wrap="square">
-            <a:spAutoFit/>
-          </a:bodyPr>
-          <a:lstStyle/>
-          <a:p>
-            <a:pPr>
-              <a:spcAft>
-                <a:spcPts val="1000"/>
-              </a:spcAft>
-            </a:pPr>
-            <a:r>
-              <a:rPr sz="1900" b="0" i="0">
-                <a:solidFill>
-                  <a:srgbClr val="1A1A1A"/>
-                </a:solidFill>
-                <a:latin typeface="Arial"/>
-              </a:rPr>
-              <a:t>•  Implement the closed-form quotes in PyTorch</a:t>
-            </a:r>
-          </a:p>
-          <a:p>
-            <a:pPr>
-              <a:spcAft>
-                <a:spcPts val="1000"/>
-              </a:spcAft>
-            </a:pPr>
-            <a:r>
-              <a:rPr sz="1900" b="0" i="0">
-                <a:solidFill>
-                  <a:srgbClr val="1A1A1A"/>
-                </a:solidFill>
-                <a:latin typeface="Arial"/>
-              </a:rPr>
-              <a:t>•  Visualize reservation price and spread vs. inventory</a:t>
-            </a:r>
-          </a:p>
-          <a:p>
-            <a:pPr>
-              <a:spcAft>
-                <a:spcPts val="1000"/>
-              </a:spcAft>
-            </a:pPr>
-            <a:r>
-              <a:rPr sz="1900" b="0" i="0">
-                <a:solidFill>
-                  <a:srgbClr val="1A1A1A"/>
-                </a:solidFill>
-                <a:latin typeface="Arial"/>
-              </a:rPr>
-              <a:t>•  Run a risk-aversion (gamma) sensitivity sweep</a:t>
-            </a:r>
-          </a:p>
-        </p:txBody>
-      </p:sp>
+        </p:spPr>
+      </p:pic>
     </p:spTree>
   </p:cSld>
   <p:clrMapOvr>
@@ -4133,19 +4003,30 @@
           <a:noFill/>
         </p:spPr>
         <p:txBody>
-          <a:bodyPr wrap="none">
+          <a:bodyPr wrap="square">
             <a:spAutoFit/>
           </a:bodyPr>
           <a:lstStyle/>
           <a:p>
             <a:r>
-              <a:rPr sz="2600" b="1" i="0">
+              <a:rPr sz="2400" b="1" i="0">
                 <a:solidFill>
                   <a:srgbClr val="990000"/>
                 </a:solidFill>
                 <a:latin typeface="Arial"/>
               </a:rPr>
-              <a:t>Reading &amp; Problem Set 3 (Python/PyTorch)</a:t>
+              <a:t>Key Equations &amp; Why We Choose Them</a:t>
+            </a:r>
+          </a:p>
+          <a:p>
+            <a:r>
+              <a:rPr sz="1300" b="0" i="1">
+                <a:solidFill>
+                  <a:srgbClr val="6D6D6D"/>
+                </a:solidFill>
+                <a:latin typeface="Arial"/>
+              </a:rPr>
+              <a:t>Full derivations in the PDF deck</a:t>
             </a:r>
           </a:p>
         </p:txBody>
@@ -4158,8 +4039,8 @@
         </p:nvSpPr>
         <p:spPr>
           <a:xfrm>
-            <a:off x="457200" y="1234440"/>
-            <a:ext cx="11247120" cy="31750"/>
+            <a:off x="457200" y="1371600"/>
+            <a:ext cx="11247120" cy="27940"/>
           </a:xfrm>
           <a:prstGeom prst="rect">
             <a:avLst/>
@@ -4201,7 +4082,7 @@
         </p:nvSpPr>
         <p:spPr>
           <a:xfrm>
-            <a:off x="640080" y="1554480"/>
+            <a:off x="640080" y="1600200"/>
             <a:ext cx="10972800" cy="4937760"/>
           </a:xfrm>
           <a:prstGeom prst="rect">
@@ -4217,33 +4098,902 @@
           <a:p>
             <a:pPr>
               <a:spcAft>
-                <a:spcPts val="1000"/>
+                <a:spcPts val="500"/>
               </a:spcAft>
             </a:pPr>
             <a:r>
-              <a:rPr sz="1900" b="0" i="0">
+              <a:rPr sz="1200" b="0" i="0">
                 <a:solidFill>
                   <a:srgbClr val="1A1A1A"/>
                 </a:solidFill>
-                <a:latin typeface="Arial"/>
-              </a:rPr>
-              <a:t>•  Avellaneda-Stoikov (2008); Cartea-Jaikumar-Penalva Ch. 10</a:t>
+                <a:latin typeface="Consolas"/>
+              </a:rPr>
+              <a:t>    dS_t = \sigma\, dW_t</a:t>
             </a:r>
           </a:p>
           <a:p>
             <a:pPr>
               <a:spcAft>
-                <a:spcPts val="1000"/>
+                <a:spcPts val="500"/>
               </a:spcAft>
             </a:pPr>
             <a:r>
-              <a:rPr sz="1900" b="0" i="0">
+              <a:rPr sz="1200" b="0" i="0">
                 <a:solidFill>
                   <a:srgbClr val="1A1A1A"/>
                 </a:solidFill>
                 <a:latin typeface="Arial"/>
               </a:rPr>
-              <a:t>•  PS3: ODE solver, closed-form quotes, simulation, gamma sweep</a:t>
+              <a:t>•  why: Arithmetic (not geometric) Brownian motion is chosen because over a short market-making horizon price changes are small and roughly additive; it keeps the HJB linear in $S$ and makes the cash dynamics exact.</a:t>
+            </a:r>
+          </a:p>
+          <a:p>
+            <a:pPr>
+              <a:spcAft>
+                <a:spcPts val="500"/>
+              </a:spcAft>
+            </a:pPr>
+            <a:r>
+              <a:rPr sz="1200" b="0" i="0">
+                <a:solidFill>
+                  <a:srgbClr val="1A1A1A"/>
+                </a:solidFill>
+                <a:latin typeface="Consolas"/>
+              </a:rPr>
+              <a:t>    \lambda(\delta) = A\, e^{-\kappa \delta}</a:t>
+            </a:r>
+          </a:p>
+          <a:p>
+            <a:pPr>
+              <a:spcAft>
+                <a:spcPts val="500"/>
+              </a:spcAft>
+            </a:pPr>
+            <a:r>
+              <a:rPr sz="1200" b="0" i="0">
+                <a:solidFill>
+                  <a:srgbClr val="1A1A1A"/>
+                </a:solidFill>
+                <a:latin typeface="Arial"/>
+              </a:rPr>
+              <a:t>•  why: Fill intensity decays with quote distance $\delta$. The exponential form is the simplest law consistent with 'further from mid $\Rightarrow$ fewer fills'; $A$ sets the base rate, $\kappa$ the decay. It also yields a closed-form optimum.</a:t>
+            </a:r>
+          </a:p>
+          <a:p>
+            <a:pPr>
+              <a:spcAft>
+                <a:spcPts val="500"/>
+              </a:spcAft>
+            </a:pPr>
+            <a:r>
+              <a:rPr sz="1200" b="0" i="0">
+                <a:solidFill>
+                  <a:srgbClr val="1A1A1A"/>
+                </a:solidFill>
+                <a:latin typeface="Consolas"/>
+              </a:rPr>
+              <a:t>    \max\ \mathbb{E}\!\left[-e^{-\gamma\,(X_T + q_T S_T)}\right]</a:t>
+            </a:r>
+          </a:p>
+          <a:p>
+            <a:pPr>
+              <a:spcAft>
+                <a:spcPts val="500"/>
+              </a:spcAft>
+            </a:pPr>
+            <a:r>
+              <a:rPr sz="1200" b="0" i="0">
+                <a:solidFill>
+                  <a:srgbClr val="1A1A1A"/>
+                </a:solidFill>
+                <a:latin typeface="Arial"/>
+              </a:rPr>
+              <a:t>•  why: CARA (exponential) utility is used because constant absolute risk aversion makes the value function factor out wealth, so the optimal quotes do not depend on the cash level -- exactly what we want for a market maker.</a:t>
+            </a:r>
+          </a:p>
+          <a:p>
+            <a:pPr>
+              <a:spcAft>
+                <a:spcPts val="500"/>
+              </a:spcAft>
+            </a:pPr>
+            <a:r>
+              <a:rPr sz="1200" b="0" i="0">
+                <a:solidFill>
+                  <a:srgbClr val="1A1A1A"/>
+                </a:solidFill>
+                <a:latin typeface="Consolas"/>
+              </a:rPr>
+              <a:t>    \partial_t V + \tfrac12\sigma^2 \partial_{SS} V + \max_{\delta^b}\lambda(\delta^b)\big[V(q{+}1,x{-}S{+}\delta^b)-V\big]+ \max_{\delta^a}\lambda(\delta^a)\big[V(q{-}1,x{+}S{+}\delta^a)-V\big]=0</a:t>
+            </a:r>
+          </a:p>
+          <a:p>
+            <a:pPr>
+              <a:spcAft>
+                <a:spcPts val="500"/>
+              </a:spcAft>
+            </a:pPr>
+            <a:r>
+              <a:rPr sz="1200" b="0" i="0">
+                <a:solidFill>
+                  <a:srgbClr val="1A1A1A"/>
+                </a:solidFill>
+                <a:latin typeface="Arial"/>
+              </a:rPr>
+              <a:t>•  why: The HJB equation: the diffusion term prices inventory risk; each $\max$ term is the dealer optimally choosing the bid/ask offset, trading fill probability against captured spread.</a:t>
+            </a:r>
+          </a:p>
+          <a:p>
+            <a:pPr>
+              <a:spcAft>
+                <a:spcPts val="500"/>
+              </a:spcAft>
+            </a:pPr>
+            <a:r>
+              <a:rPr sz="1200" b="0" i="0">
+                <a:solidFill>
+                  <a:srgbClr val="1A1A1A"/>
+                </a:solidFill>
+                <a:latin typeface="Consolas"/>
+              </a:rPr>
+              <a:t>    V(t,x,S,q) = -e^{-\gamma(x+qS)}\,\theta(t,q)</a:t>
+            </a:r>
+          </a:p>
+          <a:p>
+            <a:pPr>
+              <a:spcAft>
+                <a:spcPts val="500"/>
+              </a:spcAft>
+            </a:pPr>
+            <a:r>
+              <a:rPr sz="1200" b="0" i="0">
+                <a:solidFill>
+                  <a:srgbClr val="1A1A1A"/>
+                </a:solidFill>
+                <a:latin typeface="Arial"/>
+              </a:rPr>
+              <a:t>•  why: This ansatz is not a guess from nowhere: under CARA $+$ arithmetic dynamics the value function inherits a multiplicative structure across $(x, qS)$, so all the wealth/price dependence is exponential and only $\theta(t,q)$ remains to solve.</a:t>
+            </a:r>
+          </a:p>
+          <a:p>
+            <a:pPr>
+              <a:spcAft>
+                <a:spcPts val="500"/>
+              </a:spcAft>
+            </a:pPr>
+            <a:r>
+              <a:rPr sz="1200" b="0" i="0">
+                <a:solidFill>
+                  <a:srgbClr val="1A1A1A"/>
+                </a:solidFill>
+                <a:latin typeface="Consolas"/>
+              </a:rPr>
+              <a:t>    r(t,q) = S - q\,\gamma\,\sigma^2 (T-t)</a:t>
+            </a:r>
+          </a:p>
+          <a:p>
+            <a:pPr>
+              <a:spcAft>
+                <a:spcPts val="500"/>
+              </a:spcAft>
+            </a:pPr>
+            <a:r>
+              <a:rPr sz="1200" b="0" i="0">
+                <a:solidFill>
+                  <a:srgbClr val="1A1A1A"/>
+                </a:solidFill>
+                <a:latin typeface="Arial"/>
+              </a:rPr>
+              <a:t>•  why: The reservation (indifference) price: it sits BELOW mid when you are long ($q&gt;0$) so you quote to sell down inventory. The skew scales with risk aversion $\gamma$, variance $\sigma^2$, and time left -- more risk $\Rightarrow$ more skew.</a:t>
+            </a:r>
+          </a:p>
+          <a:p>
+            <a:pPr>
+              <a:spcAft>
+                <a:spcPts val="500"/>
+              </a:spcAft>
+            </a:pPr>
+            <a:r>
+              <a:rPr sz="1200" b="0" i="0">
+                <a:solidFill>
+                  <a:srgbClr val="1A1A1A"/>
+                </a:solidFill>
+                <a:latin typeface="Consolas"/>
+              </a:rPr>
+              <a:t>    \delta^* = \tfrac{1}{\gamma}\ln\!\big(1+\tfrac{\gamma}{\kappa}\big) + \tfrac{\gamma\sigma^2}{2}(T-t)</a:t>
+            </a:r>
+          </a:p>
+          <a:p>
+            <a:pPr>
+              <a:spcAft>
+                <a:spcPts val="500"/>
+              </a:spcAft>
+            </a:pPr>
+            <a:r>
+              <a:rPr sz="1200" b="0" i="0">
+                <a:solidFill>
+                  <a:srgbClr val="1A1A1A"/>
+                </a:solidFill>
+                <a:latin typeface="Arial"/>
+              </a:rPr>
+              <a:t>•  why: The optimal half-spread = an order-flow term $\tfrac1\gamma\ln(1+\gamma/\kappa)$ (how hard fills are to get) plus an inventory-risk term $\tfrac{\gamma\sigma^2}{2}(T-t)$. You widen when risk-averse, when volatile, and when far from the horizon.</a:t>
+            </a:r>
+          </a:p>
+        </p:txBody>
+      </p:sp>
+    </p:spTree>
+  </p:cSld>
+  <p:clrMapOvr>
+    <a:masterClrMapping/>
+  </p:clrMapOvr>
+</p:sld>
+</file>
+
+<file path=ppt/slides/slide7.xml><?xml version="1.0" encoding="utf-8"?>
+<p:sld xmlns:a="http://schemas.openxmlformats.org/drawingml/2006/main" xmlns:p="http://schemas.openxmlformats.org/presentationml/2006/main" xmlns:r="http://schemas.openxmlformats.org/officeDocument/2006/relationships">
+  <p:cSld>
+    <p:spTree>
+      <p:nvGrpSpPr>
+        <p:cNvPr id="1" name=""/>
+        <p:cNvGrpSpPr/>
+        <p:nvPr/>
+      </p:nvGrpSpPr>
+      <p:grpSpPr/>
+      <p:pic>
+        <p:nvPicPr>
+          <p:cNvPr id="2" name="Picture 1" descr="ncsu_logo.png"/>
+          <p:cNvPicPr>
+            <a:picLocks noChangeAspect="1"/>
+          </p:cNvPicPr>
+          <p:nvPr/>
+        </p:nvPicPr>
+        <p:blipFill>
+          <a:blip r:embed="rId2"/>
+          <a:stretch>
+            <a:fillRect/>
+          </a:stretch>
+        </p:blipFill>
+        <p:spPr>
+          <a:xfrm>
+            <a:off x="9784080" y="274320"/>
+            <a:ext cx="2011680" cy="316653"/>
+          </a:xfrm>
+          <a:prstGeom prst="rect">
+            <a:avLst/>
+          </a:prstGeom>
+        </p:spPr>
+      </p:pic>
+      <p:sp>
+        <p:nvSpPr>
+          <p:cNvPr id="3" name="TextBox 2"/>
+          <p:cNvSpPr txBox="1"/>
+          <p:nvPr/>
+        </p:nvSpPr>
+        <p:spPr>
+          <a:xfrm>
+            <a:off x="457200" y="457200"/>
+            <a:ext cx="8961120" cy="822960"/>
+          </a:xfrm>
+          <a:prstGeom prst="rect">
+            <a:avLst/>
+          </a:prstGeom>
+          <a:noFill/>
+        </p:spPr>
+        <p:txBody>
+          <a:bodyPr wrap="square">
+            <a:spAutoFit/>
+          </a:bodyPr>
+          <a:lstStyle/>
+          <a:p>
+            <a:r>
+              <a:rPr sz="2400" b="1" i="0">
+                <a:solidFill>
+                  <a:srgbClr val="990000"/>
+                </a:solidFill>
+                <a:latin typeface="Arial"/>
+              </a:rPr>
+              <a:t>Getting the Data from Coincall</a:t>
+            </a:r>
+          </a:p>
+          <a:p>
+            <a:r>
+              <a:rPr sz="1300" b="0" i="1">
+                <a:solidFill>
+                  <a:srgbClr val="6D6D6D"/>
+                </a:solidFill>
+                <a:latin typeface="Arial"/>
+              </a:rPr>
+              <a:t>Cross-check exact paths at https://docs.coincall.com/</a:t>
+            </a:r>
+          </a:p>
+        </p:txBody>
+      </p:sp>
+      <p:sp>
+        <p:nvSpPr>
+          <p:cNvPr id="4" name="Rectangle 3"/>
+          <p:cNvSpPr/>
+          <p:nvPr/>
+        </p:nvSpPr>
+        <p:spPr>
+          <a:xfrm>
+            <a:off x="457200" y="1371600"/>
+            <a:ext cx="11247120" cy="27940"/>
+          </a:xfrm>
+          <a:prstGeom prst="rect">
+            <a:avLst/>
+          </a:prstGeom>
+          <a:solidFill>
+            <a:srgbClr val="CC0000"/>
+          </a:solidFill>
+          <a:ln>
+            <a:noFill/>
+          </a:ln>
+        </p:spPr>
+        <p:style>
+          <a:lnRef idx="1">
+            <a:schemeClr val="accent1"/>
+          </a:lnRef>
+          <a:fillRef idx="3">
+            <a:schemeClr val="accent1"/>
+          </a:fillRef>
+          <a:effectRef idx="2">
+            <a:schemeClr val="accent1"/>
+          </a:effectRef>
+          <a:fontRef idx="minor">
+            <a:schemeClr val="lt1"/>
+          </a:fontRef>
+        </p:style>
+        <p:txBody>
+          <a:bodyPr rtlCol="0" anchor="ctr"/>
+          <a:lstStyle/>
+          <a:p>
+            <a:pPr algn="ctr"/>
+          </a:p>
+        </p:txBody>
+      </p:sp>
+      <p:sp>
+        <p:nvSpPr>
+          <p:cNvPr id="5" name="TextBox 4"/>
+          <p:cNvSpPr txBox="1"/>
+          <p:nvPr/>
+        </p:nvSpPr>
+        <p:spPr>
+          <a:xfrm>
+            <a:off x="640080" y="1600200"/>
+            <a:ext cx="10972800" cy="4937760"/>
+          </a:xfrm>
+          <a:prstGeom prst="rect">
+            <a:avLst/>
+          </a:prstGeom>
+          <a:noFill/>
+        </p:spPr>
+        <p:txBody>
+          <a:bodyPr wrap="square">
+            <a:spAutoFit/>
+          </a:bodyPr>
+          <a:lstStyle/>
+          <a:p>
+            <a:pPr>
+              <a:spcAft>
+                <a:spcPts val="500"/>
+              </a:spcAft>
+            </a:pPr>
+            <a:r>
+              <a:rPr sz="1200" b="0" i="0">
+                <a:solidFill>
+                  <a:srgbClr val="1A1A1A"/>
+                </a:solidFill>
+                <a:latin typeface="Arial"/>
+              </a:rPr>
+              <a:t>•  This week uses simulated dynamics (no live data needed).</a:t>
+            </a:r>
+          </a:p>
+          <a:p>
+            <a:pPr>
+              <a:spcAft>
+                <a:spcPts val="500"/>
+              </a:spcAft>
+            </a:pPr>
+            <a:r>
+              <a:rPr sz="1200" b="0" i="0">
+                <a:solidFill>
+                  <a:srgbClr val="1A1A1A"/>
+                </a:solidFill>
+                <a:latin typeface="Arial"/>
+              </a:rPr>
+              <a:t>•  For realistic sigma, estimate it from Coincall perp klines:</a:t>
+            </a:r>
+          </a:p>
+          <a:p>
+            <a:pPr>
+              <a:spcAft>
+                <a:spcPts val="500"/>
+              </a:spcAft>
+            </a:pPr>
+            <a:r>
+              <a:rPr sz="1200" b="0" i="0">
+                <a:solidFill>
+                  <a:srgbClr val="1A1A1A"/>
+                </a:solidFill>
+                <a:latin typeface="Consolas"/>
+              </a:rPr>
+              <a:t>    GET /open/option/market/kline/history/v1/{name}?period=m1  (or futures klines)</a:t>
+            </a:r>
+          </a:p>
+          <a:p>
+            <a:pPr>
+              <a:spcAft>
+                <a:spcPts val="500"/>
+              </a:spcAft>
+            </a:pPr>
+            <a:r>
+              <a:rPr sz="1200" b="0" i="0">
+                <a:solidFill>
+                  <a:srgbClr val="1A1A1A"/>
+                </a:solidFill>
+                <a:latin typeface="Arial"/>
+              </a:rPr>
+              <a:t>•  You will calibrate A, kappa from real fills in Week 5.</a:t>
+            </a:r>
+          </a:p>
+        </p:txBody>
+      </p:sp>
+    </p:spTree>
+  </p:cSld>
+  <p:clrMapOvr>
+    <a:masterClrMapping/>
+  </p:clrMapOvr>
+</p:sld>
+</file>
+
+<file path=ppt/slides/slide8.xml><?xml version="1.0" encoding="utf-8"?>
+<p:sld xmlns:a="http://schemas.openxmlformats.org/drawingml/2006/main" xmlns:p="http://schemas.openxmlformats.org/presentationml/2006/main" xmlns:r="http://schemas.openxmlformats.org/officeDocument/2006/relationships">
+  <p:cSld>
+    <p:spTree>
+      <p:nvGrpSpPr>
+        <p:cNvPr id="1" name=""/>
+        <p:cNvGrpSpPr/>
+        <p:nvPr/>
+      </p:nvGrpSpPr>
+      <p:grpSpPr/>
+      <p:sp>
+        <p:nvSpPr>
+          <p:cNvPr id="2" name="TextBox 1"/>
+          <p:cNvSpPr txBox="1"/>
+          <p:nvPr/>
+        </p:nvSpPr>
+        <p:spPr>
+          <a:xfrm>
+            <a:off x="457200" y="365760"/>
+            <a:ext cx="11247120" cy="640080"/>
+          </a:xfrm>
+          <a:prstGeom prst="rect">
+            <a:avLst/>
+          </a:prstGeom>
+          <a:noFill/>
+        </p:spPr>
+        <p:txBody>
+          <a:bodyPr wrap="none">
+            <a:spAutoFit/>
+          </a:bodyPr>
+          <a:lstStyle/>
+          <a:p>
+            <a:r>
+              <a:rPr sz="1800" b="1" i="0">
+                <a:solidFill>
+                  <a:srgbClr val="990000"/>
+                </a:solidFill>
+                <a:latin typeface="Arial"/>
+              </a:rPr>
+              <a:t>Code — week3_as_quotes.py -- closed-form quotes in PyTorch</a:t>
+            </a:r>
+          </a:p>
+        </p:txBody>
+      </p:sp>
+      <p:sp>
+        <p:nvSpPr>
+          <p:cNvPr id="3" name="Rectangle 2"/>
+          <p:cNvSpPr/>
+          <p:nvPr/>
+        </p:nvSpPr>
+        <p:spPr>
+          <a:xfrm>
+            <a:off x="457200" y="1097280"/>
+            <a:ext cx="11247120" cy="5394960"/>
+          </a:xfrm>
+          <a:prstGeom prst="rect">
+            <a:avLst/>
+          </a:prstGeom>
+          <a:solidFill>
+            <a:srgbClr val="F5F5F5"/>
+          </a:solidFill>
+          <a:ln w="9525">
+            <a:solidFill>
+              <a:srgbClr val="6D6D6D"/>
+            </a:solidFill>
+          </a:ln>
+        </p:spPr>
+        <p:style>
+          <a:lnRef idx="1">
+            <a:schemeClr val="accent1"/>
+          </a:lnRef>
+          <a:fillRef idx="3">
+            <a:schemeClr val="accent1"/>
+          </a:fillRef>
+          <a:effectRef idx="2">
+            <a:schemeClr val="accent1"/>
+          </a:effectRef>
+          <a:fontRef idx="minor">
+            <a:schemeClr val="lt1"/>
+          </a:fontRef>
+        </p:style>
+        <p:txBody>
+          <a:bodyPr rtlCol="0" anchor="ctr" wrap="square" lIns="182880" tIns="91440"/>
+          <a:lstStyle/>
+          <a:p>
+            <a:pPr algn="ctr">
+              <a:spcAft>
+                <a:spcPts val="0"/>
+              </a:spcAft>
+            </a:pPr>
+            <a:r>
+              <a:rPr sz="1100" b="0" i="0">
+                <a:solidFill>
+                  <a:srgbClr val="1A1A1A"/>
+                </a:solidFill>
+                <a:latin typeface="Consolas"/>
+              </a:rPr>
+              <a:t>import torch</a:t>
+            </a:r>
+          </a:p>
+          <a:p>
+            <a:pPr>
+              <a:spcAft>
+                <a:spcPts val="0"/>
+              </a:spcAft>
+            </a:pPr>
+            <a:r>
+              <a:rPr sz="1100" b="0" i="0">
+                <a:solidFill>
+                  <a:srgbClr val="1A1A1A"/>
+                </a:solidFill>
+                <a:latin typeface="Consolas"/>
+              </a:rPr>
+              <a:t> </a:t>
+            </a:r>
+          </a:p>
+          <a:p>
+            <a:pPr>
+              <a:spcAft>
+                <a:spcPts val="0"/>
+              </a:spcAft>
+            </a:pPr>
+            <a:r>
+              <a:rPr sz="1100" b="0" i="0">
+                <a:solidFill>
+                  <a:srgbClr val="1A1A1A"/>
+                </a:solidFill>
+                <a:latin typeface="Consolas"/>
+              </a:rPr>
+              <a:t>def as_quotes(S, q, gamma, sigma, kappa, tau):</a:t>
+            </a:r>
+          </a:p>
+          <a:p>
+            <a:pPr>
+              <a:spcAft>
+                <a:spcPts val="0"/>
+              </a:spcAft>
+            </a:pPr>
+            <a:r>
+              <a:rPr sz="1100" b="0" i="0">
+                <a:solidFill>
+                  <a:srgbClr val="1A1A1A"/>
+                </a:solidFill>
+                <a:latin typeface="Consolas"/>
+              </a:rPr>
+              <a:t>    """Asymptotic Avellaneda-Stoikov bid/ask. Vectorized over inventory q."""</a:t>
+            </a:r>
+          </a:p>
+          <a:p>
+            <a:pPr>
+              <a:spcAft>
+                <a:spcPts val="0"/>
+              </a:spcAft>
+            </a:pPr>
+            <a:r>
+              <a:rPr sz="1100" b="0" i="0">
+                <a:solidFill>
+                  <a:srgbClr val="1A1A1A"/>
+                </a:solidFill>
+                <a:latin typeface="Consolas"/>
+              </a:rPr>
+              <a:t>    reservation = S - q * gamma * sigma**2 * tau</a:t>
+            </a:r>
+          </a:p>
+          <a:p>
+            <a:pPr>
+              <a:spcAft>
+                <a:spcPts val="0"/>
+              </a:spcAft>
+            </a:pPr>
+            <a:r>
+              <a:rPr sz="1100" b="0" i="0">
+                <a:solidFill>
+                  <a:srgbClr val="1A1A1A"/>
+                </a:solidFill>
+                <a:latin typeface="Consolas"/>
+              </a:rPr>
+              <a:t>    half_spread = (1.0/gamma) * torch.log1p(gamma/kappa) \</a:t>
+            </a:r>
+          </a:p>
+          <a:p>
+            <a:pPr>
+              <a:spcAft>
+                <a:spcPts val="0"/>
+              </a:spcAft>
+            </a:pPr>
+            <a:r>
+              <a:rPr sz="1100" b="0" i="0">
+                <a:solidFill>
+                  <a:srgbClr val="1A1A1A"/>
+                </a:solidFill>
+                <a:latin typeface="Consolas"/>
+              </a:rPr>
+              <a:t>                  + 0.5 * gamma * sigma**2 * tau</a:t>
+            </a:r>
+          </a:p>
+          <a:p>
+            <a:pPr>
+              <a:spcAft>
+                <a:spcPts val="0"/>
+              </a:spcAft>
+            </a:pPr>
+            <a:r>
+              <a:rPr sz="1100" b="0" i="0">
+                <a:solidFill>
+                  <a:srgbClr val="1A1A1A"/>
+                </a:solidFill>
+                <a:latin typeface="Consolas"/>
+              </a:rPr>
+              <a:t>    return reservation - half_spread, reservation + half_spread  # bid, ask</a:t>
+            </a:r>
+          </a:p>
+          <a:p>
+            <a:pPr>
+              <a:spcAft>
+                <a:spcPts val="0"/>
+              </a:spcAft>
+            </a:pPr>
+            <a:r>
+              <a:rPr sz="1100" b="0" i="0">
+                <a:solidFill>
+                  <a:srgbClr val="1A1A1A"/>
+                </a:solidFill>
+                <a:latin typeface="Consolas"/>
+              </a:rPr>
+              <a:t> </a:t>
+            </a:r>
+          </a:p>
+          <a:p>
+            <a:pPr>
+              <a:spcAft>
+                <a:spcPts val="0"/>
+              </a:spcAft>
+            </a:pPr>
+            <a:r>
+              <a:rPr sz="1100" b="0" i="0">
+                <a:solidFill>
+                  <a:srgbClr val="1A1A1A"/>
+                </a:solidFill>
+                <a:latin typeface="Consolas"/>
+              </a:rPr>
+              <a:t>S = torch.tensor(100.0); q = torch.arange(-10, 11).float()</a:t>
+            </a:r>
+          </a:p>
+          <a:p>
+            <a:pPr>
+              <a:spcAft>
+                <a:spcPts val="0"/>
+              </a:spcAft>
+            </a:pPr>
+            <a:r>
+              <a:rPr sz="1100" b="0" i="0">
+                <a:solidFill>
+                  <a:srgbClr val="1A1A1A"/>
+                </a:solidFill>
+                <a:latin typeface="Consolas"/>
+              </a:rPr>
+              <a:t>bid, ask = as_quotes(S, q, gamma=0.1, sigma=2.0, kappa=1.5, tau=1.0)</a:t>
+            </a:r>
+          </a:p>
+          <a:p>
+            <a:pPr>
+              <a:spcAft>
+                <a:spcPts val="0"/>
+              </a:spcAft>
+            </a:pPr>
+            <a:r>
+              <a:rPr sz="1100" b="0" i="0">
+                <a:solidFill>
+                  <a:srgbClr val="1A1A1A"/>
+                </a:solidFill>
+                <a:latin typeface="Consolas"/>
+              </a:rPr>
+              <a:t>print("inventory -&gt;", q.tolist())</a:t>
+            </a:r>
+          </a:p>
+          <a:p>
+            <a:pPr>
+              <a:spcAft>
+                <a:spcPts val="0"/>
+              </a:spcAft>
+            </a:pPr>
+            <a:r>
+              <a:rPr sz="1100" b="0" i="0">
+                <a:solidFill>
+                  <a:srgbClr val="1A1A1A"/>
+                </a:solidFill>
+                <a:latin typeface="Consolas"/>
+              </a:rPr>
+              <a:t>print("bid       -&gt;", bid.round(decimals=2).tolist())</a:t>
+            </a:r>
+          </a:p>
+        </p:txBody>
+      </p:sp>
+    </p:spTree>
+  </p:cSld>
+  <p:clrMapOvr>
+    <a:masterClrMapping/>
+  </p:clrMapOvr>
+</p:sld>
+</file>
+
+<file path=ppt/slides/slide9.xml><?xml version="1.0" encoding="utf-8"?>
+<p:sld xmlns:a="http://schemas.openxmlformats.org/drawingml/2006/main" xmlns:p="http://schemas.openxmlformats.org/presentationml/2006/main" xmlns:r="http://schemas.openxmlformats.org/officeDocument/2006/relationships">
+  <p:cSld>
+    <p:spTree>
+      <p:nvGrpSpPr>
+        <p:cNvPr id="1" name=""/>
+        <p:cNvGrpSpPr/>
+        <p:nvPr/>
+      </p:nvGrpSpPr>
+      <p:grpSpPr/>
+      <p:pic>
+        <p:nvPicPr>
+          <p:cNvPr id="2" name="Picture 1" descr="ncsu_logo.png"/>
+          <p:cNvPicPr>
+            <a:picLocks noChangeAspect="1"/>
+          </p:cNvPicPr>
+          <p:nvPr/>
+        </p:nvPicPr>
+        <p:blipFill>
+          <a:blip r:embed="rId2"/>
+          <a:stretch>
+            <a:fillRect/>
+          </a:stretch>
+        </p:blipFill>
+        <p:spPr>
+          <a:xfrm>
+            <a:off x="9784080" y="274320"/>
+            <a:ext cx="2011680" cy="316653"/>
+          </a:xfrm>
+          <a:prstGeom prst="rect">
+            <a:avLst/>
+          </a:prstGeom>
+        </p:spPr>
+      </p:pic>
+      <p:sp>
+        <p:nvSpPr>
+          <p:cNvPr id="3" name="TextBox 2"/>
+          <p:cNvSpPr txBox="1"/>
+          <p:nvPr/>
+        </p:nvSpPr>
+        <p:spPr>
+          <a:xfrm>
+            <a:off x="457200" y="457200"/>
+            <a:ext cx="8961120" cy="822960"/>
+          </a:xfrm>
+          <a:prstGeom prst="rect">
+            <a:avLst/>
+          </a:prstGeom>
+          <a:noFill/>
+        </p:spPr>
+        <p:txBody>
+          <a:bodyPr wrap="square">
+            <a:spAutoFit/>
+          </a:bodyPr>
+          <a:lstStyle/>
+          <a:p>
+            <a:r>
+              <a:rPr sz="2400" b="1" i="0">
+                <a:solidFill>
+                  <a:srgbClr val="990000"/>
+                </a:solidFill>
+                <a:latin typeface="Arial"/>
+              </a:rPr>
+              <a:t>Reading</a:t>
+            </a:r>
+          </a:p>
+        </p:txBody>
+      </p:sp>
+      <p:sp>
+        <p:nvSpPr>
+          <p:cNvPr id="4" name="Rectangle 3"/>
+          <p:cNvSpPr/>
+          <p:nvPr/>
+        </p:nvSpPr>
+        <p:spPr>
+          <a:xfrm>
+            <a:off x="457200" y="1371600"/>
+            <a:ext cx="11247120" cy="27940"/>
+          </a:xfrm>
+          <a:prstGeom prst="rect">
+            <a:avLst/>
+          </a:prstGeom>
+          <a:solidFill>
+            <a:srgbClr val="CC0000"/>
+          </a:solidFill>
+          <a:ln>
+            <a:noFill/>
+          </a:ln>
+        </p:spPr>
+        <p:style>
+          <a:lnRef idx="1">
+            <a:schemeClr val="accent1"/>
+          </a:lnRef>
+          <a:fillRef idx="3">
+            <a:schemeClr val="accent1"/>
+          </a:fillRef>
+          <a:effectRef idx="2">
+            <a:schemeClr val="accent1"/>
+          </a:effectRef>
+          <a:fontRef idx="minor">
+            <a:schemeClr val="lt1"/>
+          </a:fontRef>
+        </p:style>
+        <p:txBody>
+          <a:bodyPr rtlCol="0" anchor="ctr"/>
+          <a:lstStyle/>
+          <a:p>
+            <a:pPr algn="ctr"/>
+          </a:p>
+        </p:txBody>
+      </p:sp>
+      <p:sp>
+        <p:nvSpPr>
+          <p:cNvPr id="5" name="TextBox 4"/>
+          <p:cNvSpPr txBox="1"/>
+          <p:nvPr/>
+        </p:nvSpPr>
+        <p:spPr>
+          <a:xfrm>
+            <a:off x="640080" y="1600200"/>
+            <a:ext cx="10972800" cy="4937760"/>
+          </a:xfrm>
+          <a:prstGeom prst="rect">
+            <a:avLst/>
+          </a:prstGeom>
+          <a:noFill/>
+        </p:spPr>
+        <p:txBody>
+          <a:bodyPr wrap="square">
+            <a:spAutoFit/>
+          </a:bodyPr>
+          <a:lstStyle/>
+          <a:p>
+            <a:pPr>
+              <a:spcAft>
+                <a:spcPts val="800"/>
+              </a:spcAft>
+            </a:pPr>
+            <a:r>
+              <a:rPr sz="1700" b="0" i="0">
+                <a:solidFill>
+                  <a:srgbClr val="1A1A1A"/>
+                </a:solidFill>
+                <a:latin typeface="Arial"/>
+              </a:rPr>
+              <a:t>•  Avellaneda-Stoikov (2008); Cartea-Jaikumar-Penalva, Ch. 10</a:t>
             </a:r>
           </a:p>
         </p:txBody>
